--- a/data/deep_dives/carteira_multiplike_plus_33122e40/exports/documentary_comparison.pptx
+++ b/data/deep_dives/carteira_multiplike_plus_33122e40/exports/documentary_comparison.pptx
@@ -4286,7 +4286,7 @@
                       <a:r>
                         <a:rPr sz="1300" b="1">
                           <a:solidFill>
-                            <a:srgbClr val="1F1F1F"/>
+                            <a:srgbClr val="FFFFFF"/>
                           </a:solidFill>
                           <a:latin typeface="Calibri"/>
                         </a:rPr>
@@ -4296,7 +4296,7 @@
                   </a:txBody>
                   <a:tcPr marL="91440" marR="91440" marT="41148" marB="41148" anchor="ctr">
                     <a:solidFill>
-                      <a:srgbClr val="EC7000"/>
+                      <a:srgbClr val="FF6200"/>
                     </a:solidFill>
                     <a:lnL>
                       <a:noFill/>
@@ -4335,7 +4335,7 @@
                       <a:r>
                         <a:rPr sz="1300" b="1">
                           <a:solidFill>
-                            <a:srgbClr val="1F1F1F"/>
+                            <a:srgbClr val="FFFFFF"/>
                           </a:solidFill>
                           <a:latin typeface="Calibri"/>
                         </a:rPr>
@@ -4345,7 +4345,7 @@
                   </a:txBody>
                   <a:tcPr marL="91440" marR="91440" marT="41148" marB="41148" anchor="ctr">
                     <a:solidFill>
-                      <a:srgbClr val="EC7000"/>
+                      <a:srgbClr val="FF6200"/>
                     </a:solidFill>
                     <a:lnL>
                       <a:noFill/>
@@ -5211,7 +5211,7 @@
                       <a:r>
                         <a:rPr sz="1300" b="1">
                           <a:solidFill>
-                            <a:srgbClr val="1F1F1F"/>
+                            <a:srgbClr val="FFFFFF"/>
                           </a:solidFill>
                           <a:latin typeface="Calibri"/>
                         </a:rPr>
@@ -5221,7 +5221,7 @@
                   </a:txBody>
                   <a:tcPr marL="91440" marR="91440" marT="41148" marB="41148" anchor="ctr">
                     <a:solidFill>
-                      <a:srgbClr val="EC7000"/>
+                      <a:srgbClr val="FF6200"/>
                     </a:solidFill>
                     <a:lnL>
                       <a:noFill/>
@@ -5260,7 +5260,7 @@
                       <a:r>
                         <a:rPr sz="1300" b="1">
                           <a:solidFill>
-                            <a:srgbClr val="1F1F1F"/>
+                            <a:srgbClr val="FFFFFF"/>
                           </a:solidFill>
                           <a:latin typeface="Calibri"/>
                         </a:rPr>
@@ -5270,7 +5270,7 @@
                   </a:txBody>
                   <a:tcPr marL="91440" marR="91440" marT="41148" marB="41148" anchor="ctr">
                     <a:solidFill>
-                      <a:srgbClr val="EC7000"/>
+                      <a:srgbClr val="FF6200"/>
                     </a:solidFill>
                     <a:lnL>
                       <a:noFill/>
@@ -5792,7 +5792,7 @@
                           </a:solidFill>
                           <a:latin typeface="Calibri"/>
                         </a:rPr>
-                        <a:t>Perda esperada/recuperabilidade e precificação; piso uniforme de PDD/crédito não confirmado.</a:t>
+                        <a:t>Perda esperada/recuperabilidade e precificação</a:t>
                       </a:r>
                     </a:p>
                   </a:txBody>
@@ -5996,7 +5996,7 @@
                       <a:r>
                         <a:rPr sz="1300" b="1">
                           <a:solidFill>
-                            <a:srgbClr val="1F1F1F"/>
+                            <a:srgbClr val="FFFFFF"/>
                           </a:solidFill>
                           <a:latin typeface="Calibri"/>
                         </a:rPr>
@@ -6006,7 +6006,7 @@
                   </a:txBody>
                   <a:tcPr marL="91440" marR="91440" marT="41148" marB="41148" anchor="ctr">
                     <a:solidFill>
-                      <a:srgbClr val="EC7000"/>
+                      <a:srgbClr val="FF6200"/>
                     </a:solidFill>
                     <a:lnL>
                       <a:noFill/>
@@ -6045,7 +6045,7 @@
                       <a:r>
                         <a:rPr sz="1300" b="1">
                           <a:solidFill>
-                            <a:srgbClr val="1F1F1F"/>
+                            <a:srgbClr val="FFFFFF"/>
                           </a:solidFill>
                           <a:latin typeface="Calibri"/>
                         </a:rPr>
@@ -6055,7 +6055,7 @@
                   </a:txBody>
                   <a:tcPr marL="91440" marR="91440" marT="41148" marB="41148" anchor="ctr">
                     <a:solidFill>
-                      <a:srgbClr val="EC7000"/>
+                      <a:srgbClr val="FF6200"/>
                     </a:solidFill>
                     <a:lnL>
                       <a:noFill/>
@@ -6855,7 +6855,7 @@
                       <a:r>
                         <a:rPr sz="1300" b="1">
                           <a:solidFill>
-                            <a:srgbClr val="1F1F1F"/>
+                            <a:srgbClr val="FFFFFF"/>
                           </a:solidFill>
                           <a:latin typeface="Calibri"/>
                         </a:rPr>
@@ -6865,7 +6865,7 @@
                   </a:txBody>
                   <a:tcPr marL="91440" marR="91440" marT="41148" marB="41148" anchor="ctr">
                     <a:solidFill>
-                      <a:srgbClr val="EC7000"/>
+                      <a:srgbClr val="FF6200"/>
                     </a:solidFill>
                     <a:lnL>
                       <a:noFill/>
@@ -6904,7 +6904,7 @@
                       <a:r>
                         <a:rPr sz="1300" b="1">
                           <a:solidFill>
-                            <a:srgbClr val="1F1F1F"/>
+                            <a:srgbClr val="FFFFFF"/>
                           </a:solidFill>
                           <a:latin typeface="Calibri"/>
                         </a:rPr>
@@ -6914,7 +6914,7 @@
                   </a:txBody>
                   <a:tcPr marL="91440" marR="91440" marT="41148" marB="41148" anchor="ctr">
                     <a:solidFill>
-                      <a:srgbClr val="EC7000"/>
+                      <a:srgbClr val="FF6200"/>
                     </a:solidFill>
                     <a:lnL>
                       <a:noFill/>
@@ -7544,7 +7544,7 @@
                       <a:r>
                         <a:rPr sz="1300" b="1">
                           <a:solidFill>
-                            <a:srgbClr val="1F1F1F"/>
+                            <a:srgbClr val="FFFFFF"/>
                           </a:solidFill>
                           <a:latin typeface="Calibri"/>
                         </a:rPr>
@@ -7554,7 +7554,7 @@
                   </a:txBody>
                   <a:tcPr marL="91440" marR="91440" marT="41148" marB="41148" anchor="ctr">
                     <a:solidFill>
-                      <a:srgbClr val="EC7000"/>
+                      <a:srgbClr val="FF6200"/>
                     </a:solidFill>
                     <a:lnL>
                       <a:noFill/>
@@ -7593,7 +7593,7 @@
                       <a:r>
                         <a:rPr sz="1300" b="1">
                           <a:solidFill>
-                            <a:srgbClr val="1F1F1F"/>
+                            <a:srgbClr val="FFFFFF"/>
                           </a:solidFill>
                           <a:latin typeface="Calibri"/>
                         </a:rPr>
@@ -7603,7 +7603,7 @@
                   </a:txBody>
                   <a:tcPr marL="91440" marR="91440" marT="41148" marB="41148" anchor="ctr">
                     <a:solidFill>
-                      <a:srgbClr val="EC7000"/>
+                      <a:srgbClr val="FF6200"/>
                     </a:solidFill>
                     <a:lnL>
                       <a:noFill/>
@@ -8093,7 +8093,7 @@
                       <a:r>
                         <a:rPr sz="1300" b="1">
                           <a:solidFill>
-                            <a:srgbClr val="1F1F1F"/>
+                            <a:srgbClr val="FFFFFF"/>
                           </a:solidFill>
                           <a:latin typeface="Calibri"/>
                         </a:rPr>
@@ -8103,7 +8103,7 @@
                   </a:txBody>
                   <a:tcPr marL="91440" marR="91440" marT="41148" marB="41148" anchor="ctr">
                     <a:solidFill>
-                      <a:srgbClr val="EC7000"/>
+                      <a:srgbClr val="FF6200"/>
                     </a:solidFill>
                     <a:lnL>
                       <a:noFill/>
@@ -8142,7 +8142,7 @@
                       <a:r>
                         <a:rPr sz="1300" b="1">
                           <a:solidFill>
-                            <a:srgbClr val="1F1F1F"/>
+                            <a:srgbClr val="FFFFFF"/>
                           </a:solidFill>
                           <a:latin typeface="Calibri"/>
                         </a:rPr>
@@ -8152,7 +8152,7 @@
                   </a:txBody>
                   <a:tcPr marL="91440" marR="91440" marT="41148" marB="41148" anchor="ctr">
                     <a:solidFill>
-                      <a:srgbClr val="EC7000"/>
+                      <a:srgbClr val="FF6200"/>
                     </a:solidFill>
                     <a:lnL>
                       <a:noFill/>
@@ -8458,7 +8458,7 @@
                           </a:solidFill>
                           <a:latin typeface="Calibri"/>
                         </a:rPr>
-                        <a:t>Incluída no componente V1/serviços da administradora; taxa separada não identificada.</a:t>
+                        <a:t>Incluída no componente V1/serviços da administradora</a:t>
                       </a:r>
                     </a:p>
                   </a:txBody>
@@ -8760,7 +8760,7 @@
                       <a:r>
                         <a:rPr sz="1300" b="1">
                           <a:solidFill>
-                            <a:srgbClr val="1F1F1F"/>
+                            <a:srgbClr val="FFFFFF"/>
                           </a:solidFill>
                           <a:latin typeface="Calibri"/>
                         </a:rPr>
@@ -8770,7 +8770,7 @@
                   </a:txBody>
                   <a:tcPr marL="91440" marR="91440" marT="41148" marB="41148" anchor="ctr">
                     <a:solidFill>
-                      <a:srgbClr val="EC7000"/>
+                      <a:srgbClr val="FF6200"/>
                     </a:solidFill>
                     <a:lnL>
                       <a:noFill/>
@@ -8809,7 +8809,7 @@
                       <a:r>
                         <a:rPr sz="1300" b="1">
                           <a:solidFill>
-                            <a:srgbClr val="1F1F1F"/>
+                            <a:srgbClr val="FFFFFF"/>
                           </a:solidFill>
                           <a:latin typeface="Calibri"/>
                         </a:rPr>
@@ -8819,7 +8819,7 @@
                   </a:txBody>
                   <a:tcPr marL="91440" marR="91440" marT="41148" marB="41148" anchor="ctr">
                     <a:solidFill>
-                      <a:srgbClr val="EC7000"/>
+                      <a:srgbClr val="FF6200"/>
                     </a:solidFill>
                     <a:lnL>
                       <a:noFill/>
@@ -9267,7 +9267,7 @@
                           </a:solidFill>
                           <a:latin typeface="Calibri"/>
                         </a:rPr>
-                        <a:t>Sem competência IME carregada em cache local</a:t>
+                        <a:t>-</a:t>
                       </a:r>
                     </a:p>
                   </a:txBody>
